--- a/examples/real_world/_out/03_product_launch.pptx
+++ b/examples/real_world/_out/03_product_launch.pptx
@@ -4918,8 +4918,8 @@
   <p:clrMapOvr>
     <a:masterClrMapping/>
   </p:clrMapOvr>
-  <p:transition xmlns:ns0="http://schemas.microsoft.com/office/powerpoint/2010/main" ns0:dur="400">
-    <p:fade/>
+  <p:transition xmlns:ns0="http://schemas.microsoft.com/office/powerpoint/2010/main" ns0:dur="1200">
+    <ns0:morph/>
   </p:transition>
   <p:timing>
     <p:tnLst>
